--- a/public/fun/pack/pptx/weddingpro/결혼식프리미엄_05_감사·답례중심_라일락실버.pptx
+++ b/public/fun/pack/pptx/weddingpro/결혼식프리미엄_05_감사·답례중심_라일락실버.pptx
@@ -113,12 +113,12 @@
   <p:extLst>
     <p:ext uri="{521415D9-36F7-43E2-AB2F-B90AF26B5E84}">
       <p14:sectionLst xmlns:p14="http://schemas.microsoft.com/office/powerpoint/2010/main">
-        <p14:section name="시작" id="{A4EFDECD-B75E-4EF7-ABB8-D7058F2AB47C}">
+        <p14:section name="시작" id="{42C5B480-0BC0-435A-B91E-89EC8B36AC25}">
           <p14:sldIdLst>
             <p14:sldId id="256"/>
           </p14:sldIdLst>
         </p14:section>
-        <p14:section name="본문" id="{BB847CD1-262F-4D43-8FF7-E0E2AFF91543}">
+        <p14:section name="본문" id="{567D72A3-6EE3-4A9B-81C8-DD7B51B1FA1D}">
           <p14:sldIdLst>
             <p14:sldId id="257"/>
             <p14:sldId id="258"/>
@@ -127,7 +127,7 @@
             <p14:sldId id="261"/>
           </p14:sldIdLst>
         </p14:section>
-        <p14:section name="마무리" id="{7702BEF1-92F3-4DCC-A157-03391AE0E349}">
+        <p14:section name="마무리" id="{8F6CA926-9DB0-44E0-8C1D-D23AB1F060EF}">
           <p14:sldIdLst>
             <p14:sldId id="262"/>
           </p14:sldIdLst>
@@ -1527,7 +1527,7 @@
             </a:lvl1pPr>
           </a:lstStyle>
           <a:p>
-            <a:fld id="{CE71EE0B-9A9B-45AF-8B21-B60B830B2084}" type="slidenum">
+            <a:fld id="{D14F8B65-0D6E-45DA-9C77-6FC7F0900EB8}" type="slidenum">
               <a:rPr lang="en-US"/>
               <a:t>‹#›</a:t>
             </a:fld>
@@ -2122,7 +2122,7 @@
             </a:lvl1pPr>
           </a:lstStyle>
           <a:p>
-            <a:fld id="{5AE38B8E-1E77-4444-AAA8-BAA48AF4B18E}" type="slidenum">
+            <a:fld id="{BB33289C-DBA6-4BF2-9A41-CBC23BBDDA97}" type="slidenum">
               <a:rPr lang="en-US"/>
               <a:t>‹#›</a:t>
             </a:fld>
@@ -2711,7 +2711,7 @@
             </a:lvl1pPr>
           </a:lstStyle>
           <a:p>
-            <a:fld id="{83DEFD72-2990-4F04-8D7B-59D0E3B2A744}" type="slidenum">
+            <a:fld id="{803F383F-5718-4BB7-A9E7-9FA109E4186B}" type="slidenum">
               <a:rPr lang="en-US"/>
               <a:t>‹#›</a:t>
             </a:fld>
@@ -3520,7 +3520,7 @@
           <a:p>
             <a:r>
               <a:rPr lang="ko-KR"/>
-              <a:t>0000. 00. 00 · 예식장 이름</a:t>
+              <a:t>날짜 입력 · 예식장 이름</a:t>
             </a:r>
           </a:p>
         </p:txBody>
@@ -3755,7 +3755,7 @@
           <a:bodyPr/>
           <a:lstStyle/>
           <a:p>
-            <a:fld id="{F076C457-D2CB-4448-9B0F-797B5E66B0A2}" type="slidenum">
+            <a:fld id="{1284D97D-2511-4A0D-A34C-68CB4ED6789F}" type="slidenum">
               <a:rPr lang="en-US"/>
               <a:t>‹#›</a:t>
             </a:fld>
@@ -4161,7 +4161,7 @@
           <a:bodyPr/>
           <a:lstStyle/>
           <a:p>
-            <a:fld id="{9708AA85-6D86-47EC-84BA-5A6F38C86A99}" type="slidenum">
+            <a:fld id="{0350F6FF-AA8B-4ACB-B9C9-0B4DF467F803}" type="slidenum">
               <a:rPr lang="en-US"/>
               <a:t>‹#›</a:t>
             </a:fld>
@@ -4505,7 +4505,7 @@
           <a:bodyPr/>
           <a:lstStyle/>
           <a:p>
-            <a:fld id="{27AC473A-469F-4A9D-8AF0-E79B26C35551}" type="slidenum">
+            <a:fld id="{ED8E6327-C7DF-43E8-949A-20E5187E8CF1}" type="slidenum">
               <a:rPr lang="en-US"/>
               <a:t>‹#›</a:t>
             </a:fld>
@@ -5808,7 +5808,7 @@
           <a:bodyPr/>
           <a:lstStyle/>
           <a:p>
-            <a:fld id="{8A5867C8-07F5-4A0B-B5BD-058D3CCAB013}" type="slidenum">
+            <a:fld id="{9FE40C77-2EC2-463E-BB3A-EF141617C167}" type="slidenum">
               <a:rPr lang="en-US"/>
               <a:t>‹#›</a:t>
             </a:fld>
@@ -5896,7 +5896,7 @@
           <a:bodyPr/>
           <a:lstStyle/>
           <a:p>
-            <a:fld id="{306CDBE6-39A4-45D6-AF7F-54D1CB861F9B}" type="slidenum">
+            <a:fld id="{2C0C4404-E6FF-4BE2-8E7F-F24519A4261B}" type="slidenum">
               <a:rPr lang="en-US"/>
               <a:t>‹#›</a:t>
             </a:fld>
